--- a/Class Materials/PPT/Module 3A PHP.pptx
+++ b/Class Materials/PPT/Module 3A PHP.pptx
@@ -1148,7 +1148,7 @@
           <a:p>
             <a:fld id="{B0C24494-34C8-4B85-95EC-EFB8BC02FE7F}" type="datetimeFigureOut">
               <a:rPr lang="en-US" smtClean="0"/>
-              <a:t>10/31/2025</a:t>
+              <a:t>11/15/2025</a:t>
             </a:fld>
             <a:endParaRPr lang="en-US"/>
           </a:p>
@@ -1314,7 +1314,7 @@
           <a:p>
             <a:fld id="{96911B5A-781F-4560-A1CC-D59FB8C1A7F6}" type="datetimeFigureOut">
               <a:rPr lang="en-US" smtClean="0"/>
-              <a:t>10/31/2025</a:t>
+              <a:t>11/15/2025</a:t>
             </a:fld>
             <a:endParaRPr lang="en-US"/>
           </a:p>
@@ -1849,7 +1849,7 @@
           <a:p>
             <a:fld id="{AAAC5A33-9226-4376-B906-4B0C7752F3F3}" type="datetime1">
               <a:rPr lang="en-US" smtClean="0"/>
-              <a:t>10/31/2025</a:t>
+              <a:t>11/15/2025</a:t>
             </a:fld>
             <a:endParaRPr lang="en-US"/>
           </a:p>
@@ -2091,7 +2091,7 @@
           <a:p>
             <a:fld id="{B95CB118-406F-4C5F-971C-D01C2075A44F}" type="datetime1">
               <a:rPr lang="en-US" smtClean="0"/>
-              <a:t>10/31/2025</a:t>
+              <a:t>11/15/2025</a:t>
             </a:fld>
             <a:endParaRPr lang="en-US"/>
           </a:p>
@@ -2285,7 +2285,7 @@
           <a:p>
             <a:fld id="{5891AAB5-29E3-454A-8B27-82FAF9AA8D2C}" type="datetime1">
               <a:rPr lang="en-US" smtClean="0"/>
-              <a:t>10/31/2025</a:t>
+              <a:t>11/15/2025</a:t>
             </a:fld>
             <a:endParaRPr lang="en-US"/>
           </a:p>
@@ -2469,7 +2469,7 @@
           <a:p>
             <a:fld id="{724AADF8-674F-4E37-AEDC-92DD750D1173}" type="datetime1">
               <a:rPr lang="en-US" smtClean="0"/>
-              <a:t>10/31/2025</a:t>
+              <a:t>11/15/2025</a:t>
             </a:fld>
             <a:endParaRPr lang="en-US"/>
           </a:p>
@@ -2730,7 +2730,7 @@
           <a:p>
             <a:fld id="{20B81AED-7B70-496A-A12E-823AEFD5C0BB}" type="datetime1">
               <a:rPr lang="en-US" smtClean="0"/>
-              <a:t>10/31/2025</a:t>
+              <a:t>11/15/2025</a:t>
             </a:fld>
             <a:endParaRPr lang="en-US"/>
           </a:p>
@@ -3031,7 +3031,7 @@
           <a:p>
             <a:fld id="{827E8D6D-3A91-4BD0-9248-7F8660A8F09B}" type="datetime1">
               <a:rPr lang="en-US" smtClean="0"/>
-              <a:t>10/31/2025</a:t>
+              <a:t>11/15/2025</a:t>
             </a:fld>
             <a:endParaRPr lang="en-US"/>
           </a:p>
@@ -3466,7 +3466,7 @@
           <a:p>
             <a:fld id="{E5BBFFE7-CAC9-497A-AAF7-C2922785C649}" type="datetime1">
               <a:rPr lang="en-US" smtClean="0"/>
-              <a:t>10/31/2025</a:t>
+              <a:t>11/15/2025</a:t>
             </a:fld>
             <a:endParaRPr lang="en-US"/>
           </a:p>
@@ -3599,7 +3599,7 @@
           <a:p>
             <a:fld id="{D1E3908D-C920-449F-B38A-64963E2B48E8}" type="datetime1">
               <a:rPr lang="en-US" smtClean="0"/>
-              <a:t>10/31/2025</a:t>
+              <a:t>11/15/2025</a:t>
             </a:fld>
             <a:endParaRPr lang="en-US"/>
           </a:p>
@@ -3710,7 +3710,7 @@
           <a:p>
             <a:fld id="{5EFBD9F8-5A17-427A-BB04-9A98943668E8}" type="datetime1">
               <a:rPr lang="en-US" smtClean="0"/>
-              <a:t>10/31/2025</a:t>
+              <a:t>11/15/2025</a:t>
             </a:fld>
             <a:endParaRPr lang="en-US"/>
           </a:p>
@@ -4001,7 +4001,7 @@
           <a:p>
             <a:fld id="{312DEC6A-E0EE-4392-B80F-E55C5E1190FC}" type="datetime1">
               <a:rPr lang="en-US" smtClean="0"/>
-              <a:t>10/31/2025</a:t>
+              <a:t>11/15/2025</a:t>
             </a:fld>
             <a:endParaRPr lang="en-US"/>
           </a:p>
@@ -4275,7 +4275,7 @@
           <a:p>
             <a:fld id="{C2A688D0-D902-44CB-BD46-3F634243F429}" type="datetime1">
               <a:rPr lang="en-US" smtClean="0"/>
-              <a:t>10/31/2025</a:t>
+              <a:t>11/15/2025</a:t>
             </a:fld>
             <a:endParaRPr lang="en-US"/>
           </a:p>
@@ -4549,7 +4549,7 @@
           <a:p>
             <a:fld id="{BE81075A-DF51-44C7-B71F-F968B902E6D0}" type="datetime1">
               <a:rPr lang="en-US" smtClean="0"/>
-              <a:t>10/31/2025</a:t>
+              <a:t>11/15/2025</a:t>
             </a:fld>
             <a:endParaRPr lang="en-US"/>
           </a:p>
@@ -5212,7 +5212,7 @@
                 <a14:useLocalDpi xmlns:a14="http://schemas.microsoft.com/office/drawing/2010/main" val="0"/>
               </a:ext>
               <a:ext uri="{96DAC541-7B7A-43D3-8B79-37D633B846F1}">
-                <asvg:svgBlip xmlns="" xmlns:asvg="http://schemas.microsoft.com/office/drawing/2016/SVG/main" r:embed="rId5"/>
+                <asvg:svgBlip xmlns:asvg="http://schemas.microsoft.com/office/drawing/2016/SVG/main" xmlns="" r:embed="rId5"/>
               </a:ext>
             </a:extLst>
           </a:blip>
@@ -5430,7 +5430,7 @@
                 <a:hlinkClick r:id="rId6">
                   <a:extLst>
                     <a:ext uri="{A12FA001-AC4F-418D-AE19-62706E023703}">
-                      <ahyp:hlinkClr xmlns="" xmlns:ahyp="http://schemas.microsoft.com/office/drawing/2018/hyperlinkcolor" val="tx"/>
+                      <ahyp:hlinkClr xmlns:ahyp="http://schemas.microsoft.com/office/drawing/2018/hyperlinkcolor" xmlns="" val="tx"/>
                     </a:ext>
                   </a:extLst>
                 </a:hlinkClick>
@@ -17413,7 +17413,7 @@
                 <a:hlinkClick r:id="rId2">
                   <a:extLst>
                     <a:ext uri="{A12FA001-AC4F-418D-AE19-62706E023703}">
-                      <ahyp:hlinkClr xmlns="" xmlns:ahyp="http://schemas.microsoft.com/office/drawing/2018/hyperlinkcolor" val="tx"/>
+                      <ahyp:hlinkClr xmlns:ahyp="http://schemas.microsoft.com/office/drawing/2018/hyperlinkcolor" xmlns="" val="tx"/>
                     </a:ext>
                   </a:extLst>
                 </a:hlinkClick>
@@ -17435,7 +17435,7 @@
                 <a:hlinkClick r:id="rId3">
                   <a:extLst>
                     <a:ext uri="{A12FA001-AC4F-418D-AE19-62706E023703}">
-                      <ahyp:hlinkClr xmlns="" xmlns:ahyp="http://schemas.microsoft.com/office/drawing/2018/hyperlinkcolor" val="tx"/>
+                      <ahyp:hlinkClr xmlns:ahyp="http://schemas.microsoft.com/office/drawing/2018/hyperlinkcolor" xmlns="" val="tx"/>
                     </a:ext>
                   </a:extLst>
                 </a:hlinkClick>
@@ -17457,7 +17457,7 @@
                 <a:hlinkClick r:id="rId4">
                   <a:extLst>
                     <a:ext uri="{A12FA001-AC4F-418D-AE19-62706E023703}">
-                      <ahyp:hlinkClr xmlns="" xmlns:ahyp="http://schemas.microsoft.com/office/drawing/2018/hyperlinkcolor" val="tx"/>
+                      <ahyp:hlinkClr xmlns:ahyp="http://schemas.microsoft.com/office/drawing/2018/hyperlinkcolor" xmlns="" val="tx"/>
                     </a:ext>
                   </a:extLst>
                 </a:hlinkClick>
@@ -17476,7 +17476,7 @@
                 <a:hlinkClick r:id="rId5">
                   <a:extLst>
                     <a:ext uri="{A12FA001-AC4F-418D-AE19-62706E023703}">
-                      <ahyp:hlinkClr xmlns="" xmlns:ahyp="http://schemas.microsoft.com/office/drawing/2018/hyperlinkcolor" val="tx"/>
+                      <ahyp:hlinkClr xmlns:ahyp="http://schemas.microsoft.com/office/drawing/2018/hyperlinkcolor" xmlns="" val="tx"/>
                     </a:ext>
                   </a:extLst>
                 </a:hlinkClick>
@@ -24756,7 +24756,7 @@
         </p:nvSpPr>
         <p:spPr>
           <a:xfrm>
-            <a:off x="447207" y="1748718"/>
+            <a:off x="533400" y="1905000"/>
             <a:ext cx="8686800" cy="3970318"/>
           </a:xfrm>
           <a:prstGeom prst="rect">
@@ -29788,6 +29788,13 @@
   <p:clrMapOvr>
     <a:masterClrMapping/>
   </p:clrMapOvr>
+  <p:timing>
+    <p:tnLst>
+      <p:par>
+        <p:cTn id="1" dur="indefinite" restart="never" nodeType="tmRoot"/>
+      </p:par>
+    </p:tnLst>
+  </p:timing>
 </p:sld>
 </file>
 
@@ -30638,6 +30645,13 @@
   <p:clrMapOvr>
     <a:masterClrMapping/>
   </p:clrMapOvr>
+  <p:timing>
+    <p:tnLst>
+      <p:par>
+        <p:cTn id="1" dur="indefinite" restart="never" nodeType="tmRoot"/>
+      </p:par>
+    </p:tnLst>
+  </p:timing>
 </p:sld>
 </file>
 
@@ -30960,6 +30974,13 @@
   <p:clrMapOvr>
     <a:masterClrMapping/>
   </p:clrMapOvr>
+  <p:timing>
+    <p:tnLst>
+      <p:par>
+        <p:cTn id="1" dur="indefinite" restart="never" nodeType="tmRoot"/>
+      </p:par>
+    </p:tnLst>
+  </p:timing>
 </p:sld>
 </file>
 
@@ -31502,6 +31523,13 @@
   <p:clrMapOvr>
     <a:masterClrMapping/>
   </p:clrMapOvr>
+  <p:timing>
+    <p:tnLst>
+      <p:par>
+        <p:cTn id="1" dur="indefinite" restart="never" nodeType="tmRoot"/>
+      </p:par>
+    </p:tnLst>
+  </p:timing>
 </p:sld>
 </file>
 
@@ -32613,6 +32641,13 @@
   <p:clrMapOvr>
     <a:masterClrMapping/>
   </p:clrMapOvr>
+  <p:timing>
+    <p:tnLst>
+      <p:par>
+        <p:cTn id="1" dur="indefinite" restart="never" nodeType="tmRoot"/>
+      </p:par>
+    </p:tnLst>
+  </p:timing>
 </p:sld>
 </file>
 
@@ -32902,7 +32937,7 @@
                 <a:hlinkClick r:id="rId2">
                   <a:extLst>
                     <a:ext uri="{A12FA001-AC4F-418D-AE19-62706E023703}">
-                      <ahyp:hlinkClr xmlns="" xmlns:ahyp="http://schemas.microsoft.com/office/drawing/2018/hyperlinkcolor" val="tx"/>
+                      <ahyp:hlinkClr xmlns:ahyp="http://schemas.microsoft.com/office/drawing/2018/hyperlinkcolor" xmlns="" val="tx"/>
                     </a:ext>
                   </a:extLst>
                 </a:hlinkClick>
@@ -32950,7 +32985,7 @@
                 <a:hlinkClick r:id="rId3">
                   <a:extLst>
                     <a:ext uri="{A12FA001-AC4F-418D-AE19-62706E023703}">
-                      <ahyp:hlinkClr xmlns="" xmlns:ahyp="http://schemas.microsoft.com/office/drawing/2018/hyperlinkcolor" val="tx"/>
+                      <ahyp:hlinkClr xmlns:ahyp="http://schemas.microsoft.com/office/drawing/2018/hyperlinkcolor" xmlns="" val="tx"/>
                     </a:ext>
                   </a:extLst>
                 </a:hlinkClick>
@@ -33067,6 +33102,13 @@
   <p:clrMapOvr>
     <a:masterClrMapping/>
   </p:clrMapOvr>
+  <p:timing>
+    <p:tnLst>
+      <p:par>
+        <p:cTn id="1" dur="indefinite" restart="never" nodeType="tmRoot"/>
+      </p:par>
+    </p:tnLst>
+  </p:timing>
 </p:sld>
 </file>
 
@@ -33739,6 +33781,13 @@
   <p:clrMapOvr>
     <a:masterClrMapping/>
   </p:clrMapOvr>
+  <p:timing>
+    <p:tnLst>
+      <p:par>
+        <p:cTn id="1" dur="indefinite" restart="never" nodeType="tmRoot"/>
+      </p:par>
+    </p:tnLst>
+  </p:timing>
 </p:sld>
 </file>
 
@@ -34394,6 +34443,13 @@
   <p:clrMapOvr>
     <a:masterClrMapping/>
   </p:clrMapOvr>
+  <p:timing>
+    <p:tnLst>
+      <p:par>
+        <p:cTn id="1" dur="indefinite" restart="never" nodeType="tmRoot"/>
+      </p:par>
+    </p:tnLst>
+  </p:timing>
 </p:sld>
 </file>
 
@@ -34719,6 +34775,13 @@
   <p:clrMapOvr>
     <a:masterClrMapping/>
   </p:clrMapOvr>
+  <p:timing>
+    <p:tnLst>
+      <p:par>
+        <p:cTn id="1" dur="indefinite" restart="never" nodeType="tmRoot"/>
+      </p:par>
+    </p:tnLst>
+  </p:timing>
 </p:sld>
 </file>
 
@@ -34917,6 +34980,13 @@
   <p:clrMapOvr>
     <a:masterClrMapping/>
   </p:clrMapOvr>
+  <p:timing>
+    <p:tnLst>
+      <p:par>
+        <p:cTn id="1" dur="indefinite" restart="never" nodeType="tmRoot"/>
+      </p:par>
+    </p:tnLst>
+  </p:timing>
 </p:sld>
 </file>
 
@@ -35170,6 +35240,13 @@
   <p:clrMapOvr>
     <a:masterClrMapping/>
   </p:clrMapOvr>
+  <p:timing>
+    <p:tnLst>
+      <p:par>
+        <p:cTn id="1" dur="indefinite" restart="never" nodeType="tmRoot"/>
+      </p:par>
+    </p:tnLst>
+  </p:timing>
 </p:sld>
 </file>
 
@@ -35637,6 +35714,13 @@
   <p:clrMapOvr>
     <a:masterClrMapping/>
   </p:clrMapOvr>
+  <p:timing>
+    <p:tnLst>
+      <p:par>
+        <p:cTn id="1" dur="indefinite" restart="never" nodeType="tmRoot"/>
+      </p:par>
+    </p:tnLst>
+  </p:timing>
 </p:sld>
 </file>
 
@@ -36059,6 +36143,13 @@
   <p:clrMapOvr>
     <a:masterClrMapping/>
   </p:clrMapOvr>
+  <p:timing>
+    <p:tnLst>
+      <p:par>
+        <p:cTn id="1" dur="indefinite" restart="never" nodeType="tmRoot"/>
+      </p:par>
+    </p:tnLst>
+  </p:timing>
 </p:sld>
 </file>
 
@@ -37349,6 +37440,13 @@
   <p:clrMapOvr>
     <a:masterClrMapping/>
   </p:clrMapOvr>
+  <p:timing>
+    <p:tnLst>
+      <p:par>
+        <p:cTn id="1" dur="indefinite" restart="never" nodeType="tmRoot"/>
+      </p:par>
+    </p:tnLst>
+  </p:timing>
 </p:sld>
 </file>
 
@@ -38027,6 +38125,13 @@
   <p:clrMapOvr>
     <a:masterClrMapping/>
   </p:clrMapOvr>
+  <p:timing>
+    <p:tnLst>
+      <p:par>
+        <p:cTn id="1" dur="indefinite" restart="never" nodeType="tmRoot"/>
+      </p:par>
+    </p:tnLst>
+  </p:timing>
 </p:sld>
 </file>
 
@@ -38401,6 +38506,13 @@
   <p:clrMapOvr>
     <a:masterClrMapping/>
   </p:clrMapOvr>
+  <p:timing>
+    <p:tnLst>
+      <p:par>
+        <p:cTn id="1" dur="indefinite" restart="never" nodeType="tmRoot"/>
+      </p:par>
+    </p:tnLst>
+  </p:timing>
 </p:sld>
 </file>
 
@@ -39361,6 +39473,15 @@
 </file>
 
 <file path=customXml/item1.xml><?xml version="1.0" encoding="utf-8"?>
+<?mso-contentType ?>
+<FormTemplates xmlns="http://schemas.microsoft.com/sharepoint/v3/contenttype/forms">
+  <Display>DocumentLibraryForm</Display>
+  <Edit>DocumentLibraryForm</Edit>
+  <New>DocumentLibraryForm</New>
+</FormTemplates>
+</file>
+
+<file path=customXml/item2.xml><?xml version="1.0" encoding="utf-8"?>
 <ct:contentTypeSchema xmlns:ct="http://schemas.microsoft.com/office/2006/metadata/contentType" xmlns:ma="http://schemas.microsoft.com/office/2006/metadata/properties/metaAttributes" ct:_="" ma:_="" ma:contentTypeName="Document" ma:contentTypeID="0x010100888FA4A4A974D54E8EF3CF1F8921BA09" ma:contentTypeVersion="3" ma:contentTypeDescription="Create a new document." ma:contentTypeScope="" ma:versionID="d7ae88f0a332b40e5260dcdf0b06131e">
   <xsd:schema xmlns:xsd="http://www.w3.org/2001/XMLSchema" xmlns:xs="http://www.w3.org/2001/XMLSchema" xmlns:p="http://schemas.microsoft.com/office/2006/metadata/properties" xmlns:ns2="c1ac3b6e-c3ea-4cbf-a06a-c0c6c6a25c6e" targetNamespace="http://schemas.microsoft.com/office/2006/metadata/properties" ma:root="true" ma:fieldsID="e38513e3120375bb0272613386818226" ns2:_="">
     <xsd:import namespace="c1ac3b6e-c3ea-4cbf-a06a-c0c6c6a25c6e"/>
@@ -39498,22 +39619,21 @@
 </ct:contentTypeSchema>
 </file>
 
-<file path=customXml/item2.xml><?xml version="1.0" encoding="utf-8"?>
+<file path=customXml/item3.xml><?xml version="1.0" encoding="utf-8"?>
 <p:properties xmlns:p="http://schemas.microsoft.com/office/2006/metadata/properties" xmlns:xsi="http://www.w3.org/2001/XMLSchema-instance" xmlns:pc="http://schemas.microsoft.com/office/infopath/2007/PartnerControls">
   <documentManagement/>
 </p:properties>
 </file>
 
-<file path=customXml/item3.xml><?xml version="1.0" encoding="utf-8"?>
-<?mso-contentType ?>
-<FormTemplates xmlns="http://schemas.microsoft.com/sharepoint/v3/contenttype/forms">
-  <Display>DocumentLibraryForm</Display>
-  <Edit>DocumentLibraryForm</Edit>
-  <New>DocumentLibraryForm</New>
-</FormTemplates>
+<file path=customXml/itemProps1.xml><?xml version="1.0" encoding="utf-8"?>
+<ds:datastoreItem xmlns:ds="http://schemas.openxmlformats.org/officeDocument/2006/customXml" ds:itemID="{C0FDA373-D5CF-4F0F-A826-9892AA050C92}">
+  <ds:schemaRefs>
+    <ds:schemaRef ds:uri="http://schemas.microsoft.com/sharepoint/v3/contenttype/forms"/>
+  </ds:schemaRefs>
+</ds:datastoreItem>
 </file>
 
-<file path=customXml/itemProps1.xml><?xml version="1.0" encoding="utf-8"?>
+<file path=customXml/itemProps2.xml><?xml version="1.0" encoding="utf-8"?>
 <ds:datastoreItem xmlns:ds="http://schemas.openxmlformats.org/officeDocument/2006/customXml" ds:itemID="{C6B240FA-E5B0-4DCE-8114-29F79287C550}">
   <ds:schemaRefs>
     <ds:schemaRef ds:uri="http://schemas.microsoft.com/office/2006/metadata/contentType"/>
@@ -39531,19 +39651,11 @@
 </ds:datastoreItem>
 </file>
 
-<file path=customXml/itemProps2.xml><?xml version="1.0" encoding="utf-8"?>
+<file path=customXml/itemProps3.xml><?xml version="1.0" encoding="utf-8"?>
 <ds:datastoreItem xmlns:ds="http://schemas.openxmlformats.org/officeDocument/2006/customXml" ds:itemID="{15DFE7C8-44AE-4CA0-BC1C-D7A115A2224E}">
   <ds:schemaRefs>
     <ds:schemaRef ds:uri="http://schemas.microsoft.com/office/2006/metadata/properties"/>
     <ds:schemaRef ds:uri="http://schemas.microsoft.com/office/infopath/2007/PartnerControls"/>
   </ds:schemaRefs>
 </ds:datastoreItem>
-</file>
-
-<file path=customXml/itemProps3.xml><?xml version="1.0" encoding="utf-8"?>
-<ds:datastoreItem xmlns:ds="http://schemas.openxmlformats.org/officeDocument/2006/customXml" ds:itemID="{C0FDA373-D5CF-4F0F-A826-9892AA050C92}">
-  <ds:schemaRefs>
-    <ds:schemaRef ds:uri="http://schemas.microsoft.com/sharepoint/v3/contenttype/forms"/>
-  </ds:schemaRefs>
-</ds:datastoreItem>
 </file>